--- a/outputs/lot4.pptx
+++ b/outputs/lot4.pptx
@@ -3463,7 +3463,7 @@
                 </a:solidFill>
                 <a:latin typeface="Alegreya Sans"/>
               </a:rPr>
-              <a:t>Trilingue FR / EN / ES</a:t>
+              <a:t>Data &amp; Compliance (BCBS 239, FINREP)</a:t>
             </a:r>
           </a:p>
           <a:p>
@@ -3771,7 +3771,7 @@
                 </a:solidFill>
                 <a:latin typeface="Alegreya Sans"/>
               </a:rPr>
-              <a:t>Cercles pros</a:t>
+              <a:t>Cercles pros &amp; expertise</a:t>
             </a:r>
             <a:r>
               <a:rPr sz="1200" b="0" i="1">
@@ -3780,41 +3780,7 @@
                 </a:solidFill>
                 <a:latin typeface="Alegreya Sans"/>
               </a:rPr>
-              <a:t> — Membre UMBREX / VERITUX</a:t>
-            </a:r>
-          </a:p>
-          <a:p>
-            <a:pPr algn="l">
-              <a:spcAft>
-                <a:spcPts val="200"/>
-              </a:spcAft>
-            </a:pPr>
-            <a:r>
-              <a:rPr sz="1200" b="1" i="0">
-                <a:solidFill>
-                  <a:srgbClr val="3AEDE5"/>
-                </a:solidFill>
-                <a:latin typeface="Alegreya Sans"/>
-              </a:rPr>
-              <a:t>• </a:t>
-            </a:r>
-            <a:r>
-              <a:rPr sz="1200" b="1" i="0">
-                <a:solidFill>
-                  <a:srgbClr val="FFFFFF"/>
-                </a:solidFill>
-                <a:latin typeface="Alegreya Sans"/>
-              </a:rPr>
-              <a:t>Intervenant</a:t>
-            </a:r>
-            <a:r>
-              <a:rPr sz="1200" b="0" i="1">
-                <a:solidFill>
-                  <a:srgbClr val="CCD6E8"/>
-                </a:solidFill>
-                <a:latin typeface="Alegreya Sans"/>
-              </a:rPr>
-              <a:t> — AlphaSights, XpertsCouncil, Les BigBoss</a:t>
+              <a:t> — UMBREX / VERITUX ; AlphaSights, GuidePoint, Les BigBoss</a:t>
             </a:r>
           </a:p>
         </p:txBody>
@@ -3888,7 +3854,7 @@
                 </a:solidFill>
                 <a:latin typeface="Alegreya Sans"/>
               </a:rPr>
-              <a:t>EXPÉRIENCE PROFESSIONNELLE</a:t>
+              <a:t>PRINCIPALES EXPÉRIENCES PROFESSIONNELLES</a:t>
             </a:r>
           </a:p>
           <a:p>
@@ -4006,16 +3972,16 @@
                 </a:solidFill>
                 <a:latin typeface="Alegreya Sans"/>
               </a:rPr>
-              <a:t>Groupe Indigo</a:t>
-            </a:r>
-            <a:r>
-              <a:rPr sz="1200" b="0" i="0">
-                <a:solidFill>
-                  <a:srgbClr val="FFFFFF"/>
-                </a:solidFill>
-                <a:latin typeface="Alegreya Sans"/>
-              </a:rPr>
-              <a:t> — Pilotage stratégique COMEX — Refonte gouvernance IT</a:t>
+              <a:t>Groupe Indigo &amp; Conseil Départemental 93</a:t>
+            </a:r>
+            <a:r>
+              <a:rPr sz="1200" b="0" i="0">
+                <a:solidFill>
+                  <a:srgbClr val="FFFFFF"/>
+                </a:solidFill>
+                <a:latin typeface="Alegreya Sans"/>
+              </a:rPr>
+              <a:t> — Conseil &amp; pilotage stratégique</a:t>
             </a:r>
             <a:r>
               <a:rPr sz="1200" b="0" i="1">
@@ -4024,7 +3990,7 @@
                 </a:solidFill>
                 <a:latin typeface="Alegreya Sans"/>
               </a:rPr>
-              <a:t>  (2025 (S2))</a:t>
+              <a:t>  (2025)</a:t>
             </a:r>
           </a:p>
           <a:p>
@@ -4049,7 +4015,7 @@
                 </a:solidFill>
                 <a:latin typeface="Alegreya Sans"/>
               </a:rPr>
-              <a:t>Diagnostic global du SI en contexte post-cyber ; vision cible du numérique et futur rôle de la DSI Groupe.</a:t>
+              <a:t>Indigo (post-cyber) : diagnostic global du SI, vision cible du numérique, plan d'investissement IT pluriannuel et cadre de gouvernance.</a:t>
             </a:r>
           </a:p>
           <a:p>
@@ -4074,7 +4040,7 @@
                 </a:solidFill>
                 <a:latin typeface="Alegreya Sans"/>
               </a:rPr>
-              <a:t>Plan d'investissement IT pluriannuel et cadre de gouvernance ; roadmap, cartographies, organigrammes cibles.</a:t>
+              <a:t>CD 93 : cadrage du programme Relation Usager — convergence de 8 projets Microsoft Dynamics, gouvernance et feuille de route pluriannuelle.</a:t>
             </a:r>
           </a:p>
           <a:p>
@@ -4167,7 +4133,7 @@
                 </a:solidFill>
                 <a:latin typeface="Alegreya Sans"/>
               </a:rPr>
-              <a:t>Crédit Agricole CIB : supervision d'une taskforce Cash Management / Correspondent Banking (20+ consultants) ; développement Banque-Assurance (PNB &gt; 200 K€).</a:t>
+              <a:t>Crédit Agricole CIB : taskforce Cash Management / Correspondent Banking (20+ consultants) ; développement Banque-Assurance (PNB &gt; 200 K€).</a:t>
             </a:r>
           </a:p>
           <a:p>
@@ -4734,7 +4700,7 @@
                 </a:solidFill>
                 <a:latin typeface="Alegreya Sans"/>
               </a:rPr>
-              <a:t>Trilingual FR / EN / ES</a:t>
+              <a:t>Data &amp; Compliance (BCBS 239, FINREP)</a:t>
             </a:r>
           </a:p>
           <a:p>
@@ -5042,7 +5008,7 @@
                 </a:solidFill>
                 <a:latin typeface="Alegreya Sans"/>
               </a:rPr>
-              <a:t>Professional circles</a:t>
+              <a:t>Professional circles &amp; expert calls</a:t>
             </a:r>
             <a:r>
               <a:rPr sz="1200" b="0" i="1">
@@ -5051,41 +5017,7 @@
                 </a:solidFill>
                 <a:latin typeface="Alegreya Sans"/>
               </a:rPr>
-              <a:t> — Member UMBREX / VERITUX</a:t>
-            </a:r>
-          </a:p>
-          <a:p>
-            <a:pPr algn="l">
-              <a:spcAft>
-                <a:spcPts val="200"/>
-              </a:spcAft>
-            </a:pPr>
-            <a:r>
-              <a:rPr sz="1200" b="1" i="0">
-                <a:solidFill>
-                  <a:srgbClr val="3AEDE5"/>
-                </a:solidFill>
-                <a:latin typeface="Alegreya Sans"/>
-              </a:rPr>
-              <a:t>• </a:t>
-            </a:r>
-            <a:r>
-              <a:rPr sz="1200" b="1" i="0">
-                <a:solidFill>
-                  <a:srgbClr val="FFFFFF"/>
-                </a:solidFill>
-                <a:latin typeface="Alegreya Sans"/>
-              </a:rPr>
-              <a:t>Speaker</a:t>
-            </a:r>
-            <a:r>
-              <a:rPr sz="1200" b="0" i="1">
-                <a:solidFill>
-                  <a:srgbClr val="CCD6E8"/>
-                </a:solidFill>
-                <a:latin typeface="Alegreya Sans"/>
-              </a:rPr>
-              <a:t> — AlphaSights, XpertsCouncil, Les BigBoss</a:t>
+              <a:t> — UMBREX / VERITUX; AlphaSights, GuidePoint, Les BigBoss</a:t>
             </a:r>
           </a:p>
         </p:txBody>
@@ -5159,7 +5091,7 @@
                 </a:solidFill>
                 <a:latin typeface="Alegreya Sans"/>
               </a:rPr>
-              <a:t>PROFESSIONAL EXPERIENCE</a:t>
+              <a:t>MAIN PROFESSIONAL EXPERIENCE</a:t>
             </a:r>
           </a:p>
           <a:p>
@@ -5277,16 +5209,16 @@
                 </a:solidFill>
                 <a:latin typeface="Alegreya Sans"/>
               </a:rPr>
-              <a:t>Groupe Indigo</a:t>
-            </a:r>
-            <a:r>
-              <a:rPr sz="1200" b="0" i="0">
-                <a:solidFill>
-                  <a:srgbClr val="FFFFFF"/>
-                </a:solidFill>
-                <a:latin typeface="Alegreya Sans"/>
-              </a:rPr>
-              <a:t> — Strategic piloting COMEX — IT governance overhaul</a:t>
+              <a:t>Groupe Indigo &amp; Seine-Saint-Denis County</a:t>
+            </a:r>
+            <a:r>
+              <a:rPr sz="1200" b="0" i="0">
+                <a:solidFill>
+                  <a:srgbClr val="FFFFFF"/>
+                </a:solidFill>
+                <a:latin typeface="Alegreya Sans"/>
+              </a:rPr>
+              <a:t> — Strategic advisory &amp; scoping</a:t>
             </a:r>
             <a:r>
               <a:rPr sz="1200" b="0" i="1">
@@ -5295,7 +5227,7 @@
                 </a:solidFill>
                 <a:latin typeface="Alegreya Sans"/>
               </a:rPr>
-              <a:t>  (2025 (H2))</a:t>
+              <a:t>  (2025)</a:t>
             </a:r>
           </a:p>
           <a:p>
@@ -5320,7 +5252,7 @@
                 </a:solidFill>
                 <a:latin typeface="Alegreya Sans"/>
               </a:rPr>
-              <a:t>Global IT diagnosis in a post-cyber context; target digital vision and future Group CIO role.</a:t>
+              <a:t>Indigo (post-cyber): global IT diagnosis, target digital vision, multi-year IT investment plan and governance framework.</a:t>
             </a:r>
           </a:p>
           <a:p>
@@ -5345,7 +5277,7 @@
                 </a:solidFill>
                 <a:latin typeface="Alegreya Sans"/>
               </a:rPr>
-              <a:t>Multi-year IT investment plan and governance framework; roadmap, mappings, target org charts.</a:t>
+              <a:t>CD 93: scoping of the Citizen Relationship program — convergence of 8 Microsoft Dynamics projects, governance and multi-year roadmap.</a:t>
             </a:r>
           </a:p>
           <a:p>
@@ -5413,7 +5345,7 @@
                 </a:solidFill>
                 <a:latin typeface="Alegreya Sans"/>
               </a:rPr>
-              <a:t>BPCE (SIGMA project): IAM management, pilot for the standardization of authorizations on the Group common foundation; training and Group-level deployment.</a:t>
+              <a:t>BPCE (SIGMA project): IAM management, pilot for standardizing authorizations on the Group common foundation; training and Group-level deployment.</a:t>
             </a:r>
           </a:p>
           <a:p>
@@ -6396,7 +6328,7 @@
                 </a:solidFill>
                 <a:latin typeface="Alegreya Sans"/>
               </a:rPr>
-              <a:t>EXPÉRIENCE PROFESSIONNELLE</a:t>
+              <a:t>PRINCIPALES EXPÉRIENCES PROFESSIONNELLES</a:t>
             </a:r>
           </a:p>
           <a:p>
@@ -7633,7 +7565,7 @@
                 </a:solidFill>
                 <a:latin typeface="Alegreya Sans"/>
               </a:rPr>
-              <a:t>PROFESSIONAL EXPERIENCE</a:t>
+              <a:t>MAIN PROFESSIONAL EXPERIENCE</a:t>
             </a:r>
           </a:p>
           <a:p>
